--- a/downloads/DCT_V1_Ch13_Slides.pptx
+++ b/downloads/DCT_V1_Ch13_Slides.pptx
@@ -130,7 +130,7 @@
   <p:extLst>
     <p:ext uri="{521415D9-36F7-43E2-AB2F-B90AF26B5E84}">
       <p14:sectionLst xmlns:p14="http://schemas.microsoft.com/office/powerpoint/2010/main">
-        <p14:section name="Opening" id="{f8a3bec0-0711-607f-4a09-323fbc39fe05}">
+        <p14:section name="Opening" id="{322e8195-aba8-6efb-8509-a258fa1977a5}">
           <p14:sldIdLst>
             <p14:sldId id="256"/>
             <p14:sldId id="257"/>
@@ -138,50 +138,50 @@
             <p14:sldId id="259"/>
           </p14:sldIdLst>
         </p14:section>
-        <p14:section name="13.1 Why Transformation Needs One Architecture" id="{ed38c624-dcd4-1cd5-31a5-b8506e3418f9}">
+        <p14:section name="13.1 Why Transformation Needs One Architecture" id="{22efd1a5-a594-b8df-39df-3ba52c68595c}">
           <p14:sldIdLst>
             <p14:sldId id="260"/>
           </p14:sldIdLst>
         </p14:section>
-        <p14:section name="13.2 The Five Architectures as Interfaces" id="{84edc4c9-67c1-50ca-03f3-a7b2af2d4223}">
+        <p14:section name="13.2 The Five Architectures as Interfaces" id="{a6877cfb-cb66-a06d-adb4-dcf5f8604d6b}">
           <p14:sldIdLst>
             <p14:sldId id="261"/>
           </p14:sldIdLst>
         </p14:section>
-        <p14:section name="13.3 Integration Principles" id="{55380785-15e6-91e5-570d-edda5895d096}">
+        <p14:section name="13.3 Integration Principles" id="{0007b4c9-4446-2654-a89c-cf5e765ed357}">
           <p14:sldIdLst>
             <p14:sldId id="262"/>
           </p14:sldIdLst>
         </p14:section>
-        <p14:section name="13.4 The Unified Enterprise Representation" id="{bf45b3f9-eef7-d858-4934-18f65deedfa4}">
+        <p14:section name="13.4 The Unified Enterprise Representation" id="{0bbcf08c-ad67-f54c-b0dd-412e16dae7ee}">
           <p14:sldIdLst>
             <p14:sldId id="263"/>
             <p14:sldId id="264"/>
           </p14:sldIdLst>
         </p14:section>
-        <p14:section name="13.5 Enterprise Architecture Interactions" id="{f98a6ef7-9d0b-9602-2ae5-9aaf6c8a9aed}">
+        <p14:section name="13.5 Enterprise Architecture Interactions" id="{e719a684-5f12-e9c7-f0c9-f7853614d21f}">
           <p14:sldIdLst>
             <p14:sldId id="265"/>
             <p14:sldId id="266"/>
           </p14:sldIdLst>
         </p14:section>
-        <p14:section name="13.6 Integrated Enterprise Dynamics" id="{763bf270-36d8-54ab-e494-661745f967e2}">
+        <p14:section name="13.6 Integrated Enterprise Dynamics" id="{54e0585d-c70e-0c75-4a2d-7346bbfe3602}">
           <p14:sldIdLst>
             <p14:sldId id="267"/>
           </p14:sldIdLst>
         </p14:section>
-        <p14:section name="13.7 Architectural Consistency" id="{5f83bb3b-cac5-8ebe-adc1-2b2aaecefbee}">
+        <p14:section name="13.7 Architectural Consistency" id="{0fe7ea9a-c95c-8243-8c03-c0843110449b}">
           <p14:sldIdLst>
             <p14:sldId id="268"/>
             <p14:sldId id="269"/>
           </p14:sldIdLst>
         </p14:section>
-        <p14:section name="13.8 The Enterprise Transformation Framework" id="{398b68a4-1319-ef09-e710-fa653964dfec}">
+        <p14:section name="13.8 The Enterprise Transformation Framework" id="{87c466dd-6922-d318-3df2-2fb48928b563}">
           <p14:sldIdLst>
             <p14:sldId id="270"/>
           </p14:sldIdLst>
         </p14:section>
-        <p14:section name="Worked Example 13.1" id="{62c5a062-6a26-5da2-3826-4b51d44c15c6}">
+        <p14:section name="Worked Example 13.1" id="{13ced279-c5d8-16fd-dadc-211a705bc0ad}">
           <p14:sldIdLst>
             <p14:sldId id="271"/>
             <p14:sldId id="272"/>
@@ -190,12 +190,12 @@
             <p14:sldId id="275"/>
           </p14:sldIdLst>
         </p14:section>
-        <p14:section name="AXIOM Lab 1.13" id="{0f725ab6-3127-5957-790c-dd5f9e2403b7}">
+        <p14:section name="AXIOM Lab 1.13" id="{ecb5b4d3-7795-7814-8834-fc2b3a07133c}">
           <p14:sldIdLst>
             <p14:sldId id="276"/>
           </p14:sldIdLst>
         </p14:section>
-        <p14:section name="Close" id="{d9f51659-3e2a-dbeb-f73b-298817ffe783}">
+        <p14:section name="Close" id="{787a308f-20e9-b43f-72fd-b1f7541d9d09}">
           <p14:sldIdLst>
             <p14:sldId id="277"/>
             <p14:sldId id="278"/>

--- a/downloads/DCT_V1_Ch13_Slides.pptx
+++ b/downloads/DCT_V1_Ch13_Slides.pptx
@@ -130,7 +130,7 @@
   <p:extLst>
     <p:ext uri="{521415D9-36F7-43E2-AB2F-B90AF26B5E84}">
       <p14:sectionLst xmlns:p14="http://schemas.microsoft.com/office/powerpoint/2010/main">
-        <p14:section name="Opening" id="{322e8195-aba8-6efb-8509-a258fa1977a5}">
+        <p14:section name="Opening" id="{50a62c7a-d551-3e0c-ed6e-4e950f6fedd2}">
           <p14:sldIdLst>
             <p14:sldId id="256"/>
             <p14:sldId id="257"/>
@@ -138,50 +138,50 @@
             <p14:sldId id="259"/>
           </p14:sldIdLst>
         </p14:section>
-        <p14:section name="13.1 Why Transformation Needs One Architecture" id="{22efd1a5-a594-b8df-39df-3ba52c68595c}">
+        <p14:section name="13.1 Why Transformation Needs One Architecture" id="{56fbdf95-b75f-ed63-dbf4-10cf67601737}">
           <p14:sldIdLst>
             <p14:sldId id="260"/>
           </p14:sldIdLst>
         </p14:section>
-        <p14:section name="13.2 The Five Architectures as Interfaces" id="{a6877cfb-cb66-a06d-adb4-dcf5f8604d6b}">
+        <p14:section name="13.2 The Five Architectures as Interfaces" id="{0aceef39-5cc6-c65c-eacd-162ca6e106fc}">
           <p14:sldIdLst>
             <p14:sldId id="261"/>
           </p14:sldIdLst>
         </p14:section>
-        <p14:section name="13.3 Integration Principles" id="{0007b4c9-4446-2654-a89c-cf5e765ed357}">
+        <p14:section name="13.3 Integration Principles" id="{c3d99d30-b14b-aba1-9e62-529abbe5d467}">
           <p14:sldIdLst>
             <p14:sldId id="262"/>
           </p14:sldIdLst>
         </p14:section>
-        <p14:section name="13.4 The Unified Enterprise Representation" id="{0bbcf08c-ad67-f54c-b0dd-412e16dae7ee}">
+        <p14:section name="13.4 The Unified Enterprise Representation" id="{943d8916-5b55-fb18-11ca-6524ccc75a9c}">
           <p14:sldIdLst>
             <p14:sldId id="263"/>
             <p14:sldId id="264"/>
           </p14:sldIdLst>
         </p14:section>
-        <p14:section name="13.5 Enterprise Architecture Interactions" id="{e719a684-5f12-e9c7-f0c9-f7853614d21f}">
+        <p14:section name="13.5 Enterprise Architecture Interactions" id="{10f7651f-22bc-5f45-c478-44d827ee93ab}">
           <p14:sldIdLst>
             <p14:sldId id="265"/>
             <p14:sldId id="266"/>
           </p14:sldIdLst>
         </p14:section>
-        <p14:section name="13.6 Integrated Enterprise Dynamics" id="{54e0585d-c70e-0c75-4a2d-7346bbfe3602}">
+        <p14:section name="13.6 Integrated Enterprise Dynamics" id="{79890a86-bcd7-889a-4988-e4ca1caf2b76}">
           <p14:sldIdLst>
             <p14:sldId id="267"/>
           </p14:sldIdLst>
         </p14:section>
-        <p14:section name="13.7 Architectural Consistency" id="{0fe7ea9a-c95c-8243-8c03-c0843110449b}">
+        <p14:section name="13.7 Architectural Consistency" id="{f527eae6-f067-5273-d78f-5861180e08dd}">
           <p14:sldIdLst>
             <p14:sldId id="268"/>
             <p14:sldId id="269"/>
           </p14:sldIdLst>
         </p14:section>
-        <p14:section name="13.8 The Enterprise Transformation Framework" id="{87c466dd-6922-d318-3df2-2fb48928b563}">
+        <p14:section name="13.8 The Enterprise Transformation Framework" id="{67fb7537-b80d-f7a5-238e-cfe2ea6652f4}">
           <p14:sldIdLst>
             <p14:sldId id="270"/>
           </p14:sldIdLst>
         </p14:section>
-        <p14:section name="Worked Example 13.1" id="{13ced279-c5d8-16fd-dadc-211a705bc0ad}">
+        <p14:section name="Worked Example 13.1" id="{d4ccc16e-53f8-5ca9-fa69-06caa44ce1cf}">
           <p14:sldIdLst>
             <p14:sldId id="271"/>
             <p14:sldId id="272"/>
@@ -190,12 +190,12 @@
             <p14:sldId id="275"/>
           </p14:sldIdLst>
         </p14:section>
-        <p14:section name="AXIOM Lab 1.13" id="{ecb5b4d3-7795-7814-8834-fc2b3a07133c}">
+        <p14:section name="AXIOM Lab 1.13" id="{6ebc6451-6915-10cf-0369-a79197734e2a}">
           <p14:sldIdLst>
             <p14:sldId id="276"/>
           </p14:sldIdLst>
         </p14:section>
-        <p14:section name="Close" id="{787a308f-20e9-b43f-72fd-b1f7541d9d09}">
+        <p14:section name="Close" id="{873e80b9-66b4-26aa-115a-547c366af186}">
           <p14:sldIdLst>
             <p14:sldId id="277"/>
             <p14:sldId id="278"/>
